--- a/session2/slides/Session2_VibeCoding_JA.pptx
+++ b/session2/slides/Session2_VibeCoding_JA.pptx
@@ -46,6 +46,16 @@
     <p:sldId id="294" r:id="rId46"/>
     <p:sldId id="295" r:id="rId47"/>
     <p:sldId id="296" r:id="rId48"/>
+    <p:sldId id="297" r:id="rId49"/>
+    <p:sldId id="298" r:id="rId50"/>
+    <p:sldId id="299" r:id="rId51"/>
+    <p:sldId id="300" r:id="rId52"/>
+    <p:sldId id="301" r:id="rId53"/>
+    <p:sldId id="302" r:id="rId54"/>
+    <p:sldId id="303" r:id="rId55"/>
+    <p:sldId id="304" r:id="rId56"/>
+    <p:sldId id="305" r:id="rId57"/>
+    <p:sldId id="306" r:id="rId58"/>
   </p:sldIdLst>
   <p:sldSz cx="12191695" cy="6858000" type="screen4x3"/>
   <p:notesSz cx="6858000" cy="9144000"/>
@@ -2582,6 +2592,441 @@
 </p:notes>
 </file>
 
+<file path=ppt/notesSlides/notesSlide34.xml><?xml version="1.0" encoding="utf-8"?>
+<p:notes xmlns:a="http://schemas.openxmlformats.org/drawingml/2006/main" xmlns:p="http://schemas.openxmlformats.org/presentationml/2006/main" xmlns:r="http://schemas.openxmlformats.org/officeDocument/2006/relationships">
+  <p:cSld>
+    <p:spTree>
+      <p:nvGrpSpPr>
+        <p:cNvPr id="1" name=""/>
+        <p:cNvGrpSpPr/>
+        <p:nvPr/>
+      </p:nvGrpSpPr>
+      <p:grpSpPr>
+        <a:xfrm>
+          <a:off x="0" y="0"/>
+          <a:ext cx="0" cy="0"/>
+          <a:chOff x="0" y="0"/>
+          <a:chExt cx="0" cy="0"/>
+        </a:xfrm>
+      </p:grpSpPr>
+      <p:sp>
+        <p:nvSpPr>
+          <p:cNvPr id="2" name="Slide Image Placeholder 1"/>
+          <p:cNvSpPr>
+            <a:spLocks noGrp="1"/>
+          </p:cNvSpPr>
+          <p:nvPr>
+            <p:ph type="sldImg" idx="2"/>
+          </p:nvPr>
+        </p:nvSpPr>
+        <p:spPr/>
+      </p:sp>
+      <p:sp>
+        <p:nvSpPr>
+          <p:cNvPr id="3" name="Notes Placeholder 2"/>
+          <p:cNvSpPr>
+            <a:spLocks noGrp="1"/>
+          </p:cNvSpPr>
+          <p:nvPr>
+            <p:ph type="body" idx="3" sz="quarter"/>
+          </p:nvPr>
+        </p:nvSpPr>
+        <p:spPr/>
+        <p:txBody>
+          <a:bodyPr/>
+          <a:lstStyle/>
+          <a:p>
+            <a:r>
+              <a:t>先ほどの API コンセプトとつなげる。「さっき遊んだ犬 API 覚えてる？リクエスト送ったら犬の画像が返ってきた。LLM も同じコンセプト——質問送ったら答えが返ってくる。違いは AI が生成したテキストってこと。」</a:t>
+            </a:r>
+          </a:p>
+        </p:txBody>
+      </p:sp>
+      <p:sp>
+        <p:nvSpPr>
+          <p:cNvPr id="4" name="Slide Number Placeholder 3"/>
+          <p:cNvSpPr>
+            <a:spLocks noGrp="1"/>
+          </p:cNvSpPr>
+          <p:nvPr>
+            <p:ph type="sldNum" idx="5" sz="quarter"/>
+          </p:nvPr>
+        </p:nvSpPr>
+        <p:spPr/>
+      </p:sp>
+    </p:spTree>
+  </p:cSld>
+  <p:clrMapOvr>
+    <a:masterClrMapping/>
+  </p:clrMapOvr>
+</p:notes>
+</file>
+
+<file path=ppt/notesSlides/notesSlide35.xml><?xml version="1.0" encoding="utf-8"?>
+<p:notes xmlns:a="http://schemas.openxmlformats.org/drawingml/2006/main" xmlns:p="http://schemas.openxmlformats.org/presentationml/2006/main" xmlns:r="http://schemas.openxmlformats.org/officeDocument/2006/relationships">
+  <p:cSld>
+    <p:spTree>
+      <p:nvGrpSpPr>
+        <p:cNvPr id="1" name=""/>
+        <p:cNvGrpSpPr/>
+        <p:nvPr/>
+      </p:nvGrpSpPr>
+      <p:grpSpPr>
+        <a:xfrm>
+          <a:off x="0" y="0"/>
+          <a:ext cx="0" cy="0"/>
+          <a:chOff x="0" y="0"/>
+          <a:chExt cx="0" cy="0"/>
+        </a:xfrm>
+      </p:grpSpPr>
+      <p:sp>
+        <p:nvSpPr>
+          <p:cNvPr id="2" name="Slide Image Placeholder 1"/>
+          <p:cNvSpPr>
+            <a:spLocks noGrp="1"/>
+          </p:cNvSpPr>
+          <p:nvPr>
+            <p:ph type="sldImg" idx="2"/>
+          </p:nvPr>
+        </p:nvSpPr>
+        <p:spPr/>
+      </p:sp>
+      <p:sp>
+        <p:nvSpPr>
+          <p:cNvPr id="3" name="Notes Placeholder 2"/>
+          <p:cNvSpPr>
+            <a:spLocks noGrp="1"/>
+          </p:cNvSpPr>
+          <p:nvPr>
+            <p:ph type="body" idx="3" sz="quarter"/>
+          </p:nvPr>
+        </p:nvSpPr>
+        <p:spPr/>
+        <p:txBody>
+          <a:bodyPr/>
+          <a:lstStyle/>
+          <a:p>
+            <a:r>
+              <a:t>この手順は彼女に操作させよう。「まず Google AI Studio で遊んでみよう。Google が提供してる AI の実験室で、Gemini モデルを無料で試せるんだ。」</a:t>
+            </a:r>
+          </a:p>
+          <a:p>
+            <a:r>
+              <a:t>いくつか質問させて、AI の回答を体験させる。</a:t>
+            </a:r>
+          </a:p>
+        </p:txBody>
+      </p:sp>
+      <p:sp>
+        <p:nvSpPr>
+          <p:cNvPr id="4" name="Slide Number Placeholder 3"/>
+          <p:cNvSpPr>
+            <a:spLocks noGrp="1"/>
+          </p:cNvSpPr>
+          <p:nvPr>
+            <p:ph type="sldNum" idx="5" sz="quarter"/>
+          </p:nvPr>
+        </p:nvSpPr>
+        <p:spPr/>
+      </p:sp>
+    </p:spTree>
+  </p:cSld>
+  <p:clrMapOvr>
+    <a:masterClrMapping/>
+  </p:clrMapOvr>
+</p:notes>
+</file>
+
+<file path=ppt/notesSlides/notesSlide36.xml><?xml version="1.0" encoding="utf-8"?>
+<p:notes xmlns:a="http://schemas.openxmlformats.org/drawingml/2006/main" xmlns:p="http://schemas.openxmlformats.org/presentationml/2006/main" xmlns:r="http://schemas.openxmlformats.org/officeDocument/2006/relationships">
+  <p:cSld>
+    <p:spTree>
+      <p:nvGrpSpPr>
+        <p:cNvPr id="1" name=""/>
+        <p:cNvGrpSpPr/>
+        <p:nvPr/>
+      </p:nvGrpSpPr>
+      <p:grpSpPr>
+        <a:xfrm>
+          <a:off x="0" y="0"/>
+          <a:ext cx="0" cy="0"/>
+          <a:chOff x="0" y="0"/>
+          <a:chExt cx="0" cy="0"/>
+        </a:xfrm>
+      </p:grpSpPr>
+      <p:sp>
+        <p:nvSpPr>
+          <p:cNvPr id="2" name="Slide Image Placeholder 1"/>
+          <p:cNvSpPr>
+            <a:spLocks noGrp="1"/>
+          </p:cNvSpPr>
+          <p:nvPr>
+            <p:ph type="sldImg" idx="2"/>
+          </p:nvPr>
+        </p:nvSpPr>
+        <p:spPr/>
+      </p:sp>
+      <p:sp>
+        <p:nvSpPr>
+          <p:cNvPr id="3" name="Notes Placeholder 2"/>
+          <p:cNvSpPr>
+            <a:spLocks noGrp="1"/>
+          </p:cNvSpPr>
+          <p:nvPr>
+            <p:ph type="body" idx="3" sz="quarter"/>
+          </p:nvPr>
+        </p:nvSpPr>
+        <p:spPr/>
+        <p:txBody>
+          <a:bodyPr/>
+          <a:lstStyle/>
+          <a:p>
+            <a:r>
+              <a:t>「API Key は家の鍵みたいなもの。この鍵があれば入れる。Google はこの鍵でどれだけリソースを使ったか計算する。だから絶対に守って、勝手に共有しちゃダメ。」</a:t>
+            </a:r>
+          </a:p>
+        </p:txBody>
+      </p:sp>
+      <p:sp>
+        <p:nvSpPr>
+          <p:cNvPr id="4" name="Slide Number Placeholder 3"/>
+          <p:cNvSpPr>
+            <a:spLocks noGrp="1"/>
+          </p:cNvSpPr>
+          <p:nvPr>
+            <p:ph type="sldNum" idx="5" sz="quarter"/>
+          </p:nvPr>
+        </p:nvSpPr>
+        <p:spPr/>
+      </p:sp>
+    </p:spTree>
+  </p:cSld>
+  <p:clrMapOvr>
+    <a:masterClrMapping/>
+  </p:clrMapOvr>
+</p:notes>
+</file>
+
+<file path=ppt/notesSlides/notesSlide37.xml><?xml version="1.0" encoding="utf-8"?>
+<p:notes xmlns:a="http://schemas.openxmlformats.org/drawingml/2006/main" xmlns:p="http://schemas.openxmlformats.org/presentationml/2006/main" xmlns:r="http://schemas.openxmlformats.org/officeDocument/2006/relationships">
+  <p:cSld>
+    <p:spTree>
+      <p:nvGrpSpPr>
+        <p:cNvPr id="1" name=""/>
+        <p:cNvGrpSpPr/>
+        <p:nvPr/>
+      </p:nvGrpSpPr>
+      <p:grpSpPr>
+        <a:xfrm>
+          <a:off x="0" y="0"/>
+          <a:ext cx="0" cy="0"/>
+          <a:chOff x="0" y="0"/>
+          <a:chExt cx="0" cy="0"/>
+        </a:xfrm>
+      </p:grpSpPr>
+      <p:sp>
+        <p:nvSpPr>
+          <p:cNvPr id="2" name="Slide Image Placeholder 1"/>
+          <p:cNvSpPr>
+            <a:spLocks noGrp="1"/>
+          </p:cNvSpPr>
+          <p:nvPr>
+            <p:ph type="sldImg" idx="2"/>
+          </p:nvPr>
+        </p:nvSpPr>
+        <p:spPr/>
+      </p:sp>
+      <p:sp>
+        <p:nvSpPr>
+          <p:cNvPr id="3" name="Notes Placeholder 2"/>
+          <p:cNvSpPr>
+            <a:spLocks noGrp="1"/>
+          </p:cNvSpPr>
+          <p:nvPr>
+            <p:ph type="body" idx="3" sz="quarter"/>
+          </p:nvPr>
+        </p:nvSpPr>
+        <p:spPr/>
+        <p:txBody>
+          <a:bodyPr/>
+          <a:lstStyle/>
+          <a:p>
+            <a:r>
+              <a:t>「これはさっき curl で犬 API をテストしたのと同じコンセプト。今回は Google Gemini の API を叩いてるんだ。」</a:t>
+            </a:r>
+          </a:p>
+          <a:p>
+            <a:r>
+              <a:t>API Key の貼り付けを手伝う必要があるかも。引用符は英語のを使うこと。</a:t>
+            </a:r>
+          </a:p>
+          <a:p>
+            <a:r>
+              <a:t>成功すれば大量の JSON が返ってきて、中に AI の回答がある。</a:t>
+            </a:r>
+          </a:p>
+        </p:txBody>
+      </p:sp>
+      <p:sp>
+        <p:nvSpPr>
+          <p:cNvPr id="4" name="Slide Number Placeholder 3"/>
+          <p:cNvSpPr>
+            <a:spLocks noGrp="1"/>
+          </p:cNvSpPr>
+          <p:nvPr>
+            <p:ph type="sldNum" idx="5" sz="quarter"/>
+          </p:nvPr>
+        </p:nvSpPr>
+        <p:spPr/>
+      </p:sp>
+    </p:spTree>
+  </p:cSld>
+  <p:clrMapOvr>
+    <a:masterClrMapping/>
+  </p:clrMapOvr>
+</p:notes>
+</file>
+
+<file path=ppt/notesSlides/notesSlide38.xml><?xml version="1.0" encoding="utf-8"?>
+<p:notes xmlns:a="http://schemas.openxmlformats.org/drawingml/2006/main" xmlns:p="http://schemas.openxmlformats.org/presentationml/2006/main" xmlns:r="http://schemas.openxmlformats.org/officeDocument/2006/relationships">
+  <p:cSld>
+    <p:spTree>
+      <p:nvGrpSpPr>
+        <p:cNvPr id="1" name=""/>
+        <p:cNvGrpSpPr/>
+        <p:nvPr/>
+      </p:nvGrpSpPr>
+      <p:grpSpPr>
+        <a:xfrm>
+          <a:off x="0" y="0"/>
+          <a:ext cx="0" cy="0"/>
+          <a:chOff x="0" y="0"/>
+          <a:chExt cx="0" cy="0"/>
+        </a:xfrm>
+      </p:grpSpPr>
+      <p:sp>
+        <p:nvSpPr>
+          <p:cNvPr id="2" name="Slide Image Placeholder 1"/>
+          <p:cNvSpPr>
+            <a:spLocks noGrp="1"/>
+          </p:cNvSpPr>
+          <p:nvPr>
+            <p:ph type="sldImg" idx="2"/>
+          </p:nvPr>
+        </p:nvSpPr>
+        <p:spPr/>
+      </p:sp>
+      <p:sp>
+        <p:nvSpPr>
+          <p:cNvPr id="3" name="Notes Placeholder 2"/>
+          <p:cNvSpPr>
+            <a:spLocks noGrp="1"/>
+          </p:cNvSpPr>
+          <p:nvPr>
+            <p:ph type="body" idx="3" sz="quarter"/>
+          </p:nvPr>
+        </p:nvSpPr>
+        <p:spPr/>
+        <p:txBody>
+          <a:bodyPr/>
+          <a:lstStyle/>
+          <a:p>
+            <a:r>
+              <a:t>セキュリティの考え方を伝える。「API Key を直接ウェブページの JavaScript に書くと、誰でも F12 押して開発者ツールで見れちゃう。だから中間に Key を隠してくれる人が必要なんだ。」</a:t>
+            </a:r>
+          </a:p>
+        </p:txBody>
+      </p:sp>
+      <p:sp>
+        <p:nvSpPr>
+          <p:cNvPr id="4" name="Slide Number Placeholder 3"/>
+          <p:cNvSpPr>
+            <a:spLocks noGrp="1"/>
+          </p:cNvSpPr>
+          <p:nvPr>
+            <p:ph type="sldNum" idx="5" sz="quarter"/>
+          </p:nvPr>
+        </p:nvSpPr>
+        <p:spPr/>
+      </p:sp>
+    </p:spTree>
+  </p:cSld>
+  <p:clrMapOvr>
+    <a:masterClrMapping/>
+  </p:clrMapOvr>
+</p:notes>
+</file>
+
+<file path=ppt/notesSlides/notesSlide39.xml><?xml version="1.0" encoding="utf-8"?>
+<p:notes xmlns:a="http://schemas.openxmlformats.org/drawingml/2006/main" xmlns:p="http://schemas.openxmlformats.org/presentationml/2006/main" xmlns:r="http://schemas.openxmlformats.org/officeDocument/2006/relationships">
+  <p:cSld>
+    <p:spTree>
+      <p:nvGrpSpPr>
+        <p:cNvPr id="1" name=""/>
+        <p:cNvGrpSpPr/>
+        <p:nvPr/>
+      </p:nvGrpSpPr>
+      <p:grpSpPr>
+        <a:xfrm>
+          <a:off x="0" y="0"/>
+          <a:ext cx="0" cy="0"/>
+          <a:chOff x="0" y="0"/>
+          <a:chExt cx="0" cy="0"/>
+        </a:xfrm>
+      </p:grpSpPr>
+      <p:sp>
+        <p:nvSpPr>
+          <p:cNvPr id="2" name="Slide Image Placeholder 1"/>
+          <p:cNvSpPr>
+            <a:spLocks noGrp="1"/>
+          </p:cNvSpPr>
+          <p:nvPr>
+            <p:ph type="sldImg" idx="2"/>
+          </p:nvPr>
+        </p:nvSpPr>
+        <p:spPr/>
+      </p:sp>
+      <p:sp>
+        <p:nvSpPr>
+          <p:cNvPr id="3" name="Notes Placeholder 2"/>
+          <p:cNvSpPr>
+            <a:spLocks noGrp="1"/>
+          </p:cNvSpPr>
+          <p:nvPr>
+            <p:ph type="body" idx="3" sz="quarter"/>
+          </p:nvPr>
+        </p:nvSpPr>
+        <p:spPr/>
+        <p:txBody>
+          <a:bodyPr/>
+          <a:lstStyle/>
+          <a:p>
+            <a:r>
+              <a:t>この手順は彼女に操作させて、隣でガイドする。「Cloudflare は大きなネットワーク会社で、無料の Worker サービスを提供してる。コードを彼らのサーバーで実行できるんだ。」</a:t>
+            </a:r>
+          </a:p>
+        </p:txBody>
+      </p:sp>
+      <p:sp>
+        <p:nvSpPr>
+          <p:cNvPr id="4" name="Slide Number Placeholder 3"/>
+          <p:cNvSpPr>
+            <a:spLocks noGrp="1"/>
+          </p:cNvSpPr>
+          <p:nvPr>
+            <p:ph type="sldNum" idx="5" sz="quarter"/>
+          </p:nvPr>
+        </p:nvSpPr>
+        <p:spPr/>
+      </p:sp>
+    </p:spTree>
+  </p:cSld>
+  <p:clrMapOvr>
+    <a:masterClrMapping/>
+  </p:clrMapOvr>
+</p:notes>
+</file>
+
 <file path=ppt/notesSlides/notesSlide4.xml><?xml version="1.0" encoding="utf-8"?>
 <p:notes xmlns:a="http://schemas.openxmlformats.org/drawingml/2006/main" xmlns:p="http://schemas.openxmlformats.org/presentationml/2006/main" xmlns:r="http://schemas.openxmlformats.org/officeDocument/2006/relationships">
   <p:cSld>
@@ -2633,6 +3078,216 @@
           <a:p>
             <a:r>
               <a:t>キーフレーズ：「今のサイトはめちゃくちゃおしゃれなポップアップストアみたいなもの——内装は完璧だけど、レジがないの。動的サイトっていうのは、そこにレジと会員システムが付いたバージョン。でもまだ焦らなくて大丈夫。」</a:t>
+            </a:r>
+          </a:p>
+        </p:txBody>
+      </p:sp>
+      <p:sp>
+        <p:nvSpPr>
+          <p:cNvPr id="4" name="Slide Number Placeholder 3"/>
+          <p:cNvSpPr>
+            <a:spLocks noGrp="1"/>
+          </p:cNvSpPr>
+          <p:nvPr>
+            <p:ph type="sldNum" idx="5" sz="quarter"/>
+          </p:nvPr>
+        </p:nvSpPr>
+        <p:spPr/>
+      </p:sp>
+    </p:spTree>
+  </p:cSld>
+  <p:clrMapOvr>
+    <a:masterClrMapping/>
+  </p:clrMapOvr>
+</p:notes>
+</file>
+
+<file path=ppt/notesSlides/notesSlide40.xml><?xml version="1.0" encoding="utf-8"?>
+<p:notes xmlns:a="http://schemas.openxmlformats.org/drawingml/2006/main" xmlns:p="http://schemas.openxmlformats.org/presentationml/2006/main" xmlns:r="http://schemas.openxmlformats.org/officeDocument/2006/relationships">
+  <p:cSld>
+    <p:spTree>
+      <p:nvGrpSpPr>
+        <p:cNvPr id="1" name=""/>
+        <p:cNvGrpSpPr/>
+        <p:nvPr/>
+      </p:nvGrpSpPr>
+      <p:grpSpPr>
+        <a:xfrm>
+          <a:off x="0" y="0"/>
+          <a:ext cx="0" cy="0"/>
+          <a:chOff x="0" y="0"/>
+          <a:chExt cx="0" cy="0"/>
+        </a:xfrm>
+      </p:grpSpPr>
+      <p:sp>
+        <p:nvSpPr>
+          <p:cNvPr id="2" name="Slide Image Placeholder 1"/>
+          <p:cNvSpPr>
+            <a:spLocks noGrp="1"/>
+          </p:cNvSpPr>
+          <p:nvPr>
+            <p:ph type="sldImg" idx="2"/>
+          </p:nvPr>
+        </p:nvSpPr>
+        <p:spPr/>
+      </p:sp>
+      <p:sp>
+        <p:nvSpPr>
+          <p:cNvPr id="3" name="Notes Placeholder 2"/>
+          <p:cNvSpPr>
+            <a:spLocks noGrp="1"/>
+          </p:cNvSpPr>
+          <p:nvPr>
+            <p:ph type="body" idx="3" sz="quarter"/>
+          </p:nvPr>
+        </p:nvSpPr>
+        <p:spPr/>
+        <p:txBody>
+          <a:bodyPr/>
+          <a:lstStyle/>
+          <a:p>
+            <a:r>
+              <a:t>このコードは彼女の AI に生成させてもいいし、直接コピペでもOK。「このコードは、ウェブページからのリクエストを受け取って、Google AI に聞いて、答えを返すんだ」と伝える。</a:t>
+            </a:r>
+          </a:p>
+        </p:txBody>
+      </p:sp>
+      <p:sp>
+        <p:nvSpPr>
+          <p:cNvPr id="4" name="Slide Number Placeholder 3"/>
+          <p:cNvSpPr>
+            <a:spLocks noGrp="1"/>
+          </p:cNvSpPr>
+          <p:nvPr>
+            <p:ph type="sldNum" idx="5" sz="quarter"/>
+          </p:nvPr>
+        </p:nvSpPr>
+        <p:spPr/>
+      </p:sp>
+    </p:spTree>
+  </p:cSld>
+  <p:clrMapOvr>
+    <a:masterClrMapping/>
+  </p:clrMapOvr>
+</p:notes>
+</file>
+
+<file path=ppt/notesSlides/notesSlide41.xml><?xml version="1.0" encoding="utf-8"?>
+<p:notes xmlns:a="http://schemas.openxmlformats.org/drawingml/2006/main" xmlns:p="http://schemas.openxmlformats.org/presentationml/2006/main" xmlns:r="http://schemas.openxmlformats.org/officeDocument/2006/relationships">
+  <p:cSld>
+    <p:spTree>
+      <p:nvGrpSpPr>
+        <p:cNvPr id="1" name=""/>
+        <p:cNvGrpSpPr/>
+        <p:nvPr/>
+      </p:nvGrpSpPr>
+      <p:grpSpPr>
+        <a:xfrm>
+          <a:off x="0" y="0"/>
+          <a:ext cx="0" cy="0"/>
+          <a:chOff x="0" y="0"/>
+          <a:chExt cx="0" cy="0"/>
+        </a:xfrm>
+      </p:grpSpPr>
+      <p:sp>
+        <p:nvSpPr>
+          <p:cNvPr id="2" name="Slide Image Placeholder 1"/>
+          <p:cNvSpPr>
+            <a:spLocks noGrp="1"/>
+          </p:cNvSpPr>
+          <p:nvPr>
+            <p:ph type="sldImg" idx="2"/>
+          </p:nvPr>
+        </p:nvSpPr>
+        <p:spPr/>
+      </p:sp>
+      <p:sp>
+        <p:nvSpPr>
+          <p:cNvPr id="3" name="Notes Placeholder 2"/>
+          <p:cNvSpPr>
+            <a:spLocks noGrp="1"/>
+          </p:cNvSpPr>
+          <p:nvPr>
+            <p:ph type="body" idx="3" sz="quarter"/>
+          </p:nvPr>
+        </p:nvSpPr>
+        <p:spPr/>
+        <p:txBody>
+          <a:bodyPr/>
+          <a:lstStyle/>
+          <a:p>
+            <a:r>
+              <a:t>「Secret は秘密の変数っていう意味。API Key をここに保存すると、コードでは env.GEMINI_API_KEY で読めるけど、外からは実際の値が見えないんだ。」</a:t>
+            </a:r>
+          </a:p>
+        </p:txBody>
+      </p:sp>
+      <p:sp>
+        <p:nvSpPr>
+          <p:cNvPr id="4" name="Slide Number Placeholder 3"/>
+          <p:cNvSpPr>
+            <a:spLocks noGrp="1"/>
+          </p:cNvSpPr>
+          <p:nvPr>
+            <p:ph type="sldNum" idx="5" sz="quarter"/>
+          </p:nvPr>
+        </p:nvSpPr>
+        <p:spPr/>
+      </p:sp>
+    </p:spTree>
+  </p:cSld>
+  <p:clrMapOvr>
+    <a:masterClrMapping/>
+  </p:clrMapOvr>
+</p:notes>
+</file>
+
+<file path=ppt/notesSlides/notesSlide42.xml><?xml version="1.0" encoding="utf-8"?>
+<p:notes xmlns:a="http://schemas.openxmlformats.org/drawingml/2006/main" xmlns:p="http://schemas.openxmlformats.org/presentationml/2006/main" xmlns:r="http://schemas.openxmlformats.org/officeDocument/2006/relationships">
+  <p:cSld>
+    <p:spTree>
+      <p:nvGrpSpPr>
+        <p:cNvPr id="1" name=""/>
+        <p:cNvGrpSpPr/>
+        <p:nvPr/>
+      </p:nvGrpSpPr>
+      <p:grpSpPr>
+        <a:xfrm>
+          <a:off x="0" y="0"/>
+          <a:ext cx="0" cy="0"/>
+          <a:chOff x="0" y="0"/>
+          <a:chExt cx="0" cy="0"/>
+        </a:xfrm>
+      </p:grpSpPr>
+      <p:sp>
+        <p:nvSpPr>
+          <p:cNvPr id="2" name="Slide Image Placeholder 1"/>
+          <p:cNvSpPr>
+            <a:spLocks noGrp="1"/>
+          </p:cNvSpPr>
+          <p:nvPr>
+            <p:ph type="sldImg" idx="2"/>
+          </p:nvPr>
+        </p:nvSpPr>
+        <p:spPr/>
+      </p:sp>
+      <p:sp>
+        <p:nvSpPr>
+          <p:cNvPr id="3" name="Notes Placeholder 2"/>
+          <p:cNvSpPr>
+            <a:spLocks noGrp="1"/>
+          </p:cNvSpPr>
+          <p:nvPr>
+            <p:ph type="body" idx="3" sz="quarter"/>
+          </p:nvPr>
+        </p:nvSpPr>
+        <p:spPr/>
+        <p:txBody>
+          <a:bodyPr/>
+          <a:lstStyle/>
+          <a:p>
+            <a:r>
+              <a:t>達成感のピーク！「おめでとう！自分だけの AI API ができたよ。これからどんなウェブページでもこの URL を呼び出せば、AI が答えてくれるようになるんだ。」</a:t>
             </a:r>
           </a:p>
         </p:txBody>
@@ -10626,7 +11281,7 @@
     <p:bg>
       <p:bgPr>
         <a:solidFill>
-          <a:srgbClr val="441133"/>
+          <a:srgbClr val="1A1A2E"/>
         </a:solidFill>
         <a:effectLst/>
       </p:bgPr>
@@ -10668,7 +11323,917 @@
               </a:defRPr>
             </a:pPr>
             <a:r>
-              <a:t>📝 付録：Jones の教え方メモ</a:t>
+              <a:t>Block 7 ▸ 上級：LLM API 実践</a:t>
+            </a:r>
+          </a:p>
+        </p:txBody>
+      </p:sp>
+    </p:spTree>
+  </p:cSld>
+  <p:clrMapOvr>
+    <a:masterClrMapping/>
+  </p:clrMapOvr>
+</p:sld>
+</file>
+
+<file path=ppt/slides/slide42.xml><?xml version="1.0" encoding="utf-8"?>
+<p:sld xmlns:a="http://schemas.openxmlformats.org/drawingml/2006/main" xmlns:p="http://schemas.openxmlformats.org/presentationml/2006/main" xmlns:r="http://schemas.openxmlformats.org/officeDocument/2006/relationships">
+  <p:cSld>
+    <p:bg>
+      <p:bgPr>
+        <a:solidFill>
+          <a:srgbClr val="1A1A2E"/>
+        </a:solidFill>
+        <a:effectLst/>
+      </p:bgPr>
+    </p:bg>
+    <p:spTree>
+      <p:nvGrpSpPr>
+        <p:cNvPr id="1" name=""/>
+        <p:cNvGrpSpPr/>
+        <p:nvPr/>
+      </p:nvGrpSpPr>
+      <p:grpSpPr/>
+      <p:sp>
+        <p:nvSpPr>
+          <p:cNvPr id="2" name="TextBox 1"/>
+          <p:cNvSpPr txBox="1"/>
+          <p:nvPr/>
+        </p:nvSpPr>
+        <p:spPr>
+          <a:xfrm>
+            <a:off x="731520" y="365760"/>
+            <a:ext cx="10058400" cy="914400"/>
+          </a:xfrm>
+          <a:prstGeom prst="rect">
+            <a:avLst/>
+          </a:prstGeom>
+          <a:noFill/>
+        </p:spPr>
+        <p:txBody>
+          <a:bodyPr wrap="square">
+            <a:spAutoFit/>
+          </a:bodyPr>
+          <a:lstStyle/>
+          <a:p>
+            <a:pPr algn="l">
+              <a:defRPr sz="3200" b="1">
+                <a:solidFill>
+                  <a:srgbClr val="FFE135"/>
+                </a:solidFill>
+              </a:defRPr>
+            </a:pPr>
+            <a:r>
+              <a:t>LLM も API だ！</a:t>
+            </a:r>
+          </a:p>
+        </p:txBody>
+      </p:sp>
+      <p:sp>
+        <p:nvSpPr>
+          <p:cNvPr id="3" name="TextBox 2"/>
+          <p:cNvSpPr txBox="1"/>
+          <p:nvPr/>
+        </p:nvSpPr>
+        <p:spPr>
+          <a:xfrm>
+            <a:off x="731520" y="1828800"/>
+            <a:ext cx="10058400" cy="3657600"/>
+          </a:xfrm>
+          <a:prstGeom prst="rect">
+            <a:avLst/>
+          </a:prstGeom>
+          <a:solidFill>
+            <a:srgbClr val="0D0D0D"/>
+          </a:solidFill>
+        </p:spPr>
+        <p:txBody>
+          <a:bodyPr wrap="square">
+            <a:spAutoFit/>
+          </a:bodyPr>
+          <a:lstStyle/>
+          <a:p>
+            <a:pPr>
+              <a:defRPr sz="1400">
+                <a:solidFill>
+                  <a:srgbClr val="00FF88"/>
+                </a:solidFill>
+                <a:latin typeface="Menlo"/>
+              </a:defRPr>
+            </a:pPr>
+            <a:r>
+              <a:t>これまで遊んだ API：</a:t>
+            </a:r>
+            <a:br/>
+            <a:r>
+              <a:t>🐕 Dog API → ランダムな犬の画像</a:t>
+            </a:r>
+            <a:br/>
+            <a:r>
+              <a:t>🐱 Cat API → ランダムな猫の画像</a:t>
+            </a:r>
+            <a:br/>
+            <a:r>
+              <a:t>🎌 Anime API → アニメキャラ検索</a:t>
+            </a:r>
+            <a:br/>
+            <a:br/>
+            <a:r>
+              <a:t>LLM API も同じ！</a:t>
+            </a:r>
+            <a:br/>
+            <a:r>
+              <a:t>📤 入力：あなたの質問</a:t>
+            </a:r>
+            <a:br/>
+            <a:r>
+              <a:t>📥 出力：AI の回答</a:t>
+            </a:r>
+            <a:br/>
+            <a:br/>
+            <a:r>
+              <a:t>違い：普通の API は固定フォーマット</a:t>
+            </a:r>
+            <a:br/>
+            <a:r>
+              <a:t>     LLM API は知的に生成されたテキスト</a:t>
+            </a:r>
+          </a:p>
+        </p:txBody>
+      </p:sp>
+    </p:spTree>
+  </p:cSld>
+  <p:clrMapOvr>
+    <a:masterClrMapping/>
+  </p:clrMapOvr>
+</p:sld>
+</file>
+
+<file path=ppt/slides/slide43.xml><?xml version="1.0" encoding="utf-8"?>
+<p:sld xmlns:a="http://schemas.openxmlformats.org/drawingml/2006/main" xmlns:p="http://schemas.openxmlformats.org/presentationml/2006/main" xmlns:r="http://schemas.openxmlformats.org/officeDocument/2006/relationships">
+  <p:cSld>
+    <p:bg>
+      <p:bgPr>
+        <a:solidFill>
+          <a:srgbClr val="1A1A2E"/>
+        </a:solidFill>
+        <a:effectLst/>
+      </p:bgPr>
+    </p:bg>
+    <p:spTree>
+      <p:nvGrpSpPr>
+        <p:cNvPr id="1" name=""/>
+        <p:cNvGrpSpPr/>
+        <p:nvPr/>
+      </p:nvGrpSpPr>
+      <p:grpSpPr/>
+      <p:sp>
+        <p:nvSpPr>
+          <p:cNvPr id="2" name="TextBox 1"/>
+          <p:cNvSpPr txBox="1"/>
+          <p:nvPr/>
+        </p:nvSpPr>
+        <p:spPr>
+          <a:xfrm>
+            <a:off x="731520" y="365760"/>
+            <a:ext cx="10058400" cy="914400"/>
+          </a:xfrm>
+          <a:prstGeom prst="rect">
+            <a:avLst/>
+          </a:prstGeom>
+          <a:noFill/>
+        </p:spPr>
+        <p:txBody>
+          <a:bodyPr wrap="square">
+            <a:spAutoFit/>
+          </a:bodyPr>
+          <a:lstStyle/>
+          <a:p>
+            <a:pPr algn="l">
+              <a:defRPr sz="3200" b="1">
+                <a:solidFill>
+                  <a:srgbClr val="FFE135"/>
+                </a:solidFill>
+              </a:defRPr>
+            </a:pPr>
+            <a:r>
+              <a:t>Google AI Studio で遊ぼう</a:t>
+            </a:r>
+          </a:p>
+        </p:txBody>
+      </p:sp>
+    </p:spTree>
+  </p:cSld>
+  <p:clrMapOvr>
+    <a:masterClrMapping/>
+  </p:clrMapOvr>
+</p:sld>
+</file>
+
+<file path=ppt/slides/slide44.xml><?xml version="1.0" encoding="utf-8"?>
+<p:sld xmlns:a="http://schemas.openxmlformats.org/drawingml/2006/main" xmlns:p="http://schemas.openxmlformats.org/presentationml/2006/main" xmlns:r="http://schemas.openxmlformats.org/officeDocument/2006/relationships">
+  <p:cSld>
+    <p:bg>
+      <p:bgPr>
+        <a:solidFill>
+          <a:srgbClr val="1A1A2E"/>
+        </a:solidFill>
+        <a:effectLst/>
+      </p:bgPr>
+    </p:bg>
+    <p:spTree>
+      <p:nvGrpSpPr>
+        <p:cNvPr id="1" name=""/>
+        <p:cNvGrpSpPr/>
+        <p:nvPr/>
+      </p:nvGrpSpPr>
+      <p:grpSpPr/>
+      <p:sp>
+        <p:nvSpPr>
+          <p:cNvPr id="2" name="TextBox 1"/>
+          <p:cNvSpPr txBox="1"/>
+          <p:nvPr/>
+        </p:nvSpPr>
+        <p:spPr>
+          <a:xfrm>
+            <a:off x="731520" y="365760"/>
+            <a:ext cx="10058400" cy="914400"/>
+          </a:xfrm>
+          <a:prstGeom prst="rect">
+            <a:avLst/>
+          </a:prstGeom>
+          <a:noFill/>
+        </p:spPr>
+        <p:txBody>
+          <a:bodyPr wrap="square">
+            <a:spAutoFit/>
+          </a:bodyPr>
+          <a:lstStyle/>
+          <a:p>
+            <a:pPr algn="l">
+              <a:defRPr sz="3200" b="1">
+                <a:solidFill>
+                  <a:srgbClr val="FFE135"/>
+                </a:solidFill>
+              </a:defRPr>
+            </a:pPr>
+            <a:r>
+              <a:t>API Key を作成</a:t>
+            </a:r>
+          </a:p>
+        </p:txBody>
+      </p:sp>
+      <p:sp>
+        <p:nvSpPr>
+          <p:cNvPr id="3" name="TextBox 2"/>
+          <p:cNvSpPr txBox="1"/>
+          <p:nvPr/>
+        </p:nvSpPr>
+        <p:spPr>
+          <a:xfrm>
+            <a:off x="731520" y="1371600"/>
+            <a:ext cx="6400800" cy="3657600"/>
+          </a:xfrm>
+          <a:prstGeom prst="rect">
+            <a:avLst/>
+          </a:prstGeom>
+          <a:noFill/>
+        </p:spPr>
+        <p:txBody>
+          <a:bodyPr wrap="square">
+            <a:spAutoFit/>
+          </a:bodyPr>
+          <a:lstStyle/>
+          <a:p>
+            <a:pPr algn="l">
+              <a:spcAft>
+                <a:spcPts val="800"/>
+              </a:spcAft>
+              <a:defRPr sz="2000" b="0">
+                <a:solidFill>
+                  <a:srgbClr val="FFFFFF"/>
+                </a:solidFill>
+              </a:defRPr>
+            </a:pPr>
+            <a:r>
+              <a:t>• API Key は自分だけの鍵</a:t>
+            </a:r>
+          </a:p>
+          <a:p>
+            <a:pPr>
+              <a:spcAft>
+                <a:spcPts val="800"/>
+              </a:spcAft>
+              <a:defRPr sz="2000">
+                <a:solidFill>
+                  <a:srgbClr val="FFFFFF"/>
+                </a:solidFill>
+              </a:defRPr>
+            </a:pPr>
+            <a:r>
+              <a:t>• 他の人に教えない</a:t>
+            </a:r>
+          </a:p>
+          <a:p>
+            <a:pPr>
+              <a:spcAft>
+                <a:spcPts val="800"/>
+              </a:spcAft>
+              <a:defRPr sz="2000">
+                <a:solidFill>
+                  <a:srgbClr val="FFFFFF"/>
+                </a:solidFill>
+              </a:defRPr>
+            </a:pPr>
+            <a:r>
+              <a:t>• 公開コードに書かない</a:t>
+            </a:r>
+          </a:p>
+        </p:txBody>
+      </p:sp>
+      <p:sp>
+        <p:nvSpPr>
+          <p:cNvPr id="4" name="TextBox 3"/>
+          <p:cNvSpPr txBox="1"/>
+          <p:nvPr/>
+        </p:nvSpPr>
+        <p:spPr>
+          <a:xfrm>
+            <a:off x="731520" y="2606040"/>
+            <a:ext cx="10058400" cy="3657600"/>
+          </a:xfrm>
+          <a:prstGeom prst="rect">
+            <a:avLst/>
+          </a:prstGeom>
+          <a:solidFill>
+            <a:srgbClr val="0D0D0D"/>
+          </a:solidFill>
+        </p:spPr>
+        <p:txBody>
+          <a:bodyPr wrap="square">
+            <a:spAutoFit/>
+          </a:bodyPr>
+          <a:lstStyle/>
+          <a:p>
+            <a:pPr>
+              <a:defRPr sz="1400">
+                <a:solidFill>
+                  <a:srgbClr val="00FF88"/>
+                </a:solidFill>
+                <a:latin typeface="Menlo"/>
+              </a:defRPr>
+            </a:pPr>
+            <a:r>
+              <a:t>⚠️ 重要！</a:t>
+            </a:r>
+            <a:br/>
+            <a:r>
+              <a:t>- API Key は自分だけの鍵</a:t>
+            </a:r>
+            <a:br/>
+            <a:r>
+              <a:t>- 他の人に教えない</a:t>
+            </a:r>
+            <a:br/>
+            <a:r>
+              <a:t>- 公開コードに書かない</a:t>
+            </a:r>
+          </a:p>
+        </p:txBody>
+      </p:sp>
+    </p:spTree>
+  </p:cSld>
+  <p:clrMapOvr>
+    <a:masterClrMapping/>
+  </p:clrMapOvr>
+</p:sld>
+</file>
+
+<file path=ppt/slides/slide45.xml><?xml version="1.0" encoding="utf-8"?>
+<p:sld xmlns:a="http://schemas.openxmlformats.org/drawingml/2006/main" xmlns:p="http://schemas.openxmlformats.org/presentationml/2006/main" xmlns:r="http://schemas.openxmlformats.org/officeDocument/2006/relationships">
+  <p:cSld>
+    <p:bg>
+      <p:bgPr>
+        <a:solidFill>
+          <a:srgbClr val="1A1A2E"/>
+        </a:solidFill>
+        <a:effectLst/>
+      </p:bgPr>
+    </p:bg>
+    <p:spTree>
+      <p:nvGrpSpPr>
+        <p:cNvPr id="1" name=""/>
+        <p:cNvGrpSpPr/>
+        <p:nvPr/>
+      </p:nvGrpSpPr>
+      <p:grpSpPr/>
+      <p:sp>
+        <p:nvSpPr>
+          <p:cNvPr id="2" name="TextBox 1"/>
+          <p:cNvSpPr txBox="1"/>
+          <p:nvPr/>
+        </p:nvSpPr>
+        <p:spPr>
+          <a:xfrm>
+            <a:off x="731520" y="365760"/>
+            <a:ext cx="10058400" cy="914400"/>
+          </a:xfrm>
+          <a:prstGeom prst="rect">
+            <a:avLst/>
+          </a:prstGeom>
+          <a:noFill/>
+        </p:spPr>
+        <p:txBody>
+          <a:bodyPr wrap="square">
+            <a:spAutoFit/>
+          </a:bodyPr>
+          <a:lstStyle/>
+          <a:p>
+            <a:pPr algn="l">
+              <a:defRPr sz="3200" b="1">
+                <a:solidFill>
+                  <a:srgbClr val="FFE135"/>
+                </a:solidFill>
+              </a:defRPr>
+            </a:pPr>
+            <a:r>
+              <a:t>Terminal でテスト</a:t>
+            </a:r>
+          </a:p>
+        </p:txBody>
+      </p:sp>
+      <p:sp>
+        <p:nvSpPr>
+          <p:cNvPr id="3" name="TextBox 2"/>
+          <p:cNvSpPr txBox="1"/>
+          <p:nvPr/>
+        </p:nvSpPr>
+        <p:spPr>
+          <a:xfrm>
+            <a:off x="731520" y="1828800"/>
+            <a:ext cx="10058400" cy="3657600"/>
+          </a:xfrm>
+          <a:prstGeom prst="rect">
+            <a:avLst/>
+          </a:prstGeom>
+          <a:solidFill>
+            <a:srgbClr val="0D0D0D"/>
+          </a:solidFill>
+        </p:spPr>
+        <p:txBody>
+          <a:bodyPr wrap="square">
+            <a:spAutoFit/>
+          </a:bodyPr>
+          <a:lstStyle/>
+          <a:p>
+            <a:pPr>
+              <a:defRPr sz="1400">
+                <a:solidFill>
+                  <a:srgbClr val="00FF88"/>
+                </a:solidFill>
+                <a:latin typeface="Menlo"/>
+              </a:defRPr>
+            </a:pPr>
+            <a:r>
+              <a:t>curl -X POST https://generativelanguage.googleapis.com/v1beta/interactions \</a:t>
+            </a:r>
+            <a:br/>
+            <a:r>
+              <a:t>  -H "x-goog-api-key: あなたのAPI_KEY" \</a:t>
+            </a:r>
+            <a:br/>
+            <a:r>
+              <a:t>  -H "Content-Type: application/json" \</a:t>
+            </a:r>
+            <a:br/>
+            <a:r>
+              <a:t>  -d '{</a:t>
+            </a:r>
+            <a:br/>
+            <a:r>
+              <a:t>    "model": "gemini-2.5-flash",</a:t>
+            </a:r>
+            <a:br/>
+            <a:r>
+              <a:t>    "input": "Hello, how are you?"</a:t>
+            </a:r>
+            <a:br/>
+            <a:r>
+              <a:t>  }'</a:t>
+            </a:r>
+          </a:p>
+        </p:txBody>
+      </p:sp>
+    </p:spTree>
+  </p:cSld>
+  <p:clrMapOvr>
+    <a:masterClrMapping/>
+  </p:clrMapOvr>
+</p:sld>
+</file>
+
+<file path=ppt/slides/slide46.xml><?xml version="1.0" encoding="utf-8"?>
+<p:sld xmlns:a="http://schemas.openxmlformats.org/drawingml/2006/main" xmlns:p="http://schemas.openxmlformats.org/presentationml/2006/main" xmlns:r="http://schemas.openxmlformats.org/officeDocument/2006/relationships">
+  <p:cSld>
+    <p:bg>
+      <p:bgPr>
+        <a:solidFill>
+          <a:srgbClr val="1A1A2E"/>
+        </a:solidFill>
+        <a:effectLst/>
+      </p:bgPr>
+    </p:bg>
+    <p:spTree>
+      <p:nvGrpSpPr>
+        <p:cNvPr id="1" name=""/>
+        <p:cNvGrpSpPr/>
+        <p:nvPr/>
+      </p:nvGrpSpPr>
+      <p:grpSpPr/>
+      <p:sp>
+        <p:nvSpPr>
+          <p:cNvPr id="2" name="TextBox 1"/>
+          <p:cNvSpPr txBox="1"/>
+          <p:nvPr/>
+        </p:nvSpPr>
+        <p:spPr>
+          <a:xfrm>
+            <a:off x="731520" y="365760"/>
+            <a:ext cx="10058400" cy="914400"/>
+          </a:xfrm>
+          <a:prstGeom prst="rect">
+            <a:avLst/>
+          </a:prstGeom>
+          <a:noFill/>
+        </p:spPr>
+        <p:txBody>
+          <a:bodyPr wrap="square">
+            <a:spAutoFit/>
+          </a:bodyPr>
+          <a:lstStyle/>
+          <a:p>
+            <a:pPr algn="l">
+              <a:defRPr sz="3200" b="1">
+                <a:solidFill>
+                  <a:srgbClr val="FFE135"/>
+                </a:solidFill>
+              </a:defRPr>
+            </a:pPr>
+            <a:r>
+              <a:t>Worker が必要な理由</a:t>
+            </a:r>
+          </a:p>
+        </p:txBody>
+      </p:sp>
+      <p:sp>
+        <p:nvSpPr>
+          <p:cNvPr id="3" name="TextBox 2"/>
+          <p:cNvSpPr txBox="1"/>
+          <p:nvPr/>
+        </p:nvSpPr>
+        <p:spPr>
+          <a:xfrm>
+            <a:off x="731520" y="1828800"/>
+            <a:ext cx="10058400" cy="3657600"/>
+          </a:xfrm>
+          <a:prstGeom prst="rect">
+            <a:avLst/>
+          </a:prstGeom>
+          <a:solidFill>
+            <a:srgbClr val="0D0D0D"/>
+          </a:solidFill>
+        </p:spPr>
+        <p:txBody>
+          <a:bodyPr wrap="square">
+            <a:spAutoFit/>
+          </a:bodyPr>
+          <a:lstStyle/>
+          <a:p>
+            <a:pPr>
+              <a:defRPr sz="1400">
+                <a:solidFill>
+                  <a:srgbClr val="00FF88"/>
+                </a:solidFill>
+                <a:latin typeface="Menlo"/>
+              </a:defRPr>
+            </a:pPr>
+            <a:r>
+              <a:t>問題：</a:t>
+            </a:r>
+            <a:br/>
+            <a:r>
+              <a:t>もし API Key をウェブページに書いたら...</a:t>
+            </a:r>
+            <a:br/>
+            <a:r>
+              <a:t>❌ 誰でもソースコードが見える</a:t>
+            </a:r>
+            <a:br/>
+            <a:r>
+              <a:t>❌ 誰でも Key を盗める</a:t>
+            </a:r>
+            <a:br/>
+            <a:r>
+              <a:t>❌ 無料枠を使い切られる</a:t>
+            </a:r>
+            <a:br/>
+            <a:br/>
+            <a:r>
+              <a:t>解決策：Cloudflare Worker</a:t>
+            </a:r>
+            <a:br/>
+            <a:r>
+              <a:t>✅ Key は Worker の中に隠す</a:t>
+            </a:r>
+            <a:br/>
+            <a:r>
+              <a:t>✅ ウェブページは Worker の URL だけ知ってる</a:t>
+            </a:r>
+            <a:br/>
+            <a:br/>
+            <a:r>
+              <a:t>[あなたのサイト] → [Worker] → [Google AI]</a:t>
+            </a:r>
+            <a:br/>
+            <a:r>
+              <a:t>                 Key はここ</a:t>
+            </a:r>
+          </a:p>
+        </p:txBody>
+      </p:sp>
+    </p:spTree>
+  </p:cSld>
+  <p:clrMapOvr>
+    <a:masterClrMapping/>
+  </p:clrMapOvr>
+</p:sld>
+</file>
+
+<file path=ppt/slides/slide47.xml><?xml version="1.0" encoding="utf-8"?>
+<p:sld xmlns:a="http://schemas.openxmlformats.org/drawingml/2006/main" xmlns:p="http://schemas.openxmlformats.org/presentationml/2006/main" xmlns:r="http://schemas.openxmlformats.org/officeDocument/2006/relationships">
+  <p:cSld>
+    <p:bg>
+      <p:bgPr>
+        <a:solidFill>
+          <a:srgbClr val="1A1A2E"/>
+        </a:solidFill>
+        <a:effectLst/>
+      </p:bgPr>
+    </p:bg>
+    <p:spTree>
+      <p:nvGrpSpPr>
+        <p:cNvPr id="1" name=""/>
+        <p:cNvGrpSpPr/>
+        <p:nvPr/>
+      </p:nvGrpSpPr>
+      <p:grpSpPr/>
+      <p:sp>
+        <p:nvSpPr>
+          <p:cNvPr id="2" name="TextBox 1"/>
+          <p:cNvSpPr txBox="1"/>
+          <p:nvPr/>
+        </p:nvSpPr>
+        <p:spPr>
+          <a:xfrm>
+            <a:off x="731520" y="365760"/>
+            <a:ext cx="10058400" cy="914400"/>
+          </a:xfrm>
+          <a:prstGeom prst="rect">
+            <a:avLst/>
+          </a:prstGeom>
+          <a:noFill/>
+        </p:spPr>
+        <p:txBody>
+          <a:bodyPr wrap="square">
+            <a:spAutoFit/>
+          </a:bodyPr>
+          <a:lstStyle/>
+          <a:p>
+            <a:pPr algn="l">
+              <a:defRPr sz="3200" b="1">
+                <a:solidFill>
+                  <a:srgbClr val="FFE135"/>
+                </a:solidFill>
+              </a:defRPr>
+            </a:pPr>
+            <a:r>
+              <a:t>Worker をデプロイ</a:t>
+            </a:r>
+          </a:p>
+        </p:txBody>
+      </p:sp>
+    </p:spTree>
+  </p:cSld>
+  <p:clrMapOvr>
+    <a:masterClrMapping/>
+  </p:clrMapOvr>
+</p:sld>
+</file>
+
+<file path=ppt/slides/slide48.xml><?xml version="1.0" encoding="utf-8"?>
+<p:sld xmlns:a="http://schemas.openxmlformats.org/drawingml/2006/main" xmlns:p="http://schemas.openxmlformats.org/presentationml/2006/main" xmlns:r="http://schemas.openxmlformats.org/officeDocument/2006/relationships">
+  <p:cSld>
+    <p:bg>
+      <p:bgPr>
+        <a:solidFill>
+          <a:srgbClr val="1A1A2E"/>
+        </a:solidFill>
+        <a:effectLst/>
+      </p:bgPr>
+    </p:bg>
+    <p:spTree>
+      <p:nvGrpSpPr>
+        <p:cNvPr id="1" name=""/>
+        <p:cNvGrpSpPr/>
+        <p:nvPr/>
+      </p:nvGrpSpPr>
+      <p:grpSpPr/>
+      <p:sp>
+        <p:nvSpPr>
+          <p:cNvPr id="2" name="TextBox 1"/>
+          <p:cNvSpPr txBox="1"/>
+          <p:nvPr/>
+        </p:nvSpPr>
+        <p:spPr>
+          <a:xfrm>
+            <a:off x="731520" y="365760"/>
+            <a:ext cx="10058400" cy="914400"/>
+          </a:xfrm>
+          <a:prstGeom prst="rect">
+            <a:avLst/>
+          </a:prstGeom>
+          <a:noFill/>
+        </p:spPr>
+        <p:txBody>
+          <a:bodyPr wrap="square">
+            <a:spAutoFit/>
+          </a:bodyPr>
+          <a:lstStyle/>
+          <a:p>
+            <a:pPr algn="l">
+              <a:defRPr sz="3200" b="1">
+                <a:solidFill>
+                  <a:srgbClr val="FFE135"/>
+                </a:solidFill>
+              </a:defRPr>
+            </a:pPr>
+            <a:r>
+              <a:t>コードを貼り付け</a:t>
+            </a:r>
+          </a:p>
+        </p:txBody>
+      </p:sp>
+      <p:sp>
+        <p:nvSpPr>
+          <p:cNvPr id="3" name="TextBox 2"/>
+          <p:cNvSpPr txBox="1"/>
+          <p:nvPr/>
+        </p:nvSpPr>
+        <p:spPr>
+          <a:xfrm>
+            <a:off x="731520" y="1828800"/>
+            <a:ext cx="10058400" cy="3657600"/>
+          </a:xfrm>
+          <a:prstGeom prst="rect">
+            <a:avLst/>
+          </a:prstGeom>
+          <a:solidFill>
+            <a:srgbClr val="0D0D0D"/>
+          </a:solidFill>
+        </p:spPr>
+        <p:txBody>
+          <a:bodyPr wrap="square">
+            <a:spAutoFit/>
+          </a:bodyPr>
+          <a:lstStyle/>
+          <a:p>
+            <a:pPr>
+              <a:defRPr sz="1400">
+                <a:solidFill>
+                  <a:srgbClr val="00FF88"/>
+                </a:solidFill>
+                <a:latin typeface="Menlo"/>
+              </a:defRPr>
+            </a:pPr>
+            <a:r>
+              <a:t>export default {</a:t>
+            </a:r>
+            <a:br/>
+            <a:r>
+              <a:t>  async fetch(request, env) {</a:t>
+            </a:r>
+            <a:br/>
+            <a:r>
+              <a:t>    if (request.method !== "POST") {</a:t>
+            </a:r>
+            <a:br/>
+            <a:r>
+              <a:t>      return new Response("Use POST", { status: 405 });</a:t>
+            </a:r>
+            <a:br/>
+            <a:r>
+              <a:t>    }</a:t>
+            </a:r>
+            <a:br/>
+            <a:r>
+              <a:t>    const { prompt } = await request.json();</a:t>
+            </a:r>
+            <a:br/>
+            <a:r>
+              <a:t>    const res = await fetch(</a:t>
+            </a:r>
+            <a:br/>
+            <a:r>
+              <a:t>      "https://generativelanguage.googleapis.com/v1beta/interactions",</a:t>
+            </a:r>
+            <a:br/>
+            <a:r>
+              <a:t>      {</a:t>
+            </a:r>
+            <a:br/>
+            <a:r>
+              <a:t>        method: "POST",</a:t>
+            </a:r>
+            <a:br/>
+            <a:r>
+              <a:t>        headers: {</a:t>
+            </a:r>
+            <a:br/>
+            <a:r>
+              <a:t>          "Content-Type": "application/json",</a:t>
+            </a:r>
+            <a:br/>
+            <a:r>
+              <a:t>          "x-goog-api-key": env.GEMINI_API_KEY</a:t>
+            </a:r>
+            <a:br/>
+            <a:r>
+              <a:t>        },</a:t>
+            </a:r>
+            <a:br/>
+            <a:r>
+              <a:t>        body: JSON.stringify({</a:t>
+            </a:r>
+          </a:p>
+        </p:txBody>
+      </p:sp>
+    </p:spTree>
+  </p:cSld>
+  <p:clrMapOvr>
+    <a:masterClrMapping/>
+  </p:clrMapOvr>
+</p:sld>
+</file>
+
+<file path=ppt/slides/slide49.xml><?xml version="1.0" encoding="utf-8"?>
+<p:sld xmlns:a="http://schemas.openxmlformats.org/drawingml/2006/main" xmlns:p="http://schemas.openxmlformats.org/presentationml/2006/main" xmlns:r="http://schemas.openxmlformats.org/officeDocument/2006/relationships">
+  <p:cSld>
+    <p:bg>
+      <p:bgPr>
+        <a:solidFill>
+          <a:srgbClr val="1A1A2E"/>
+        </a:solidFill>
+        <a:effectLst/>
+      </p:bgPr>
+    </p:bg>
+    <p:spTree>
+      <p:nvGrpSpPr>
+        <p:cNvPr id="1" name=""/>
+        <p:cNvGrpSpPr/>
+        <p:nvPr/>
+      </p:nvGrpSpPr>
+      <p:grpSpPr/>
+      <p:sp>
+        <p:nvSpPr>
+          <p:cNvPr id="2" name="TextBox 1"/>
+          <p:cNvSpPr txBox="1"/>
+          <p:nvPr/>
+        </p:nvSpPr>
+        <p:spPr>
+          <a:xfrm>
+            <a:off x="731520" y="365760"/>
+            <a:ext cx="10058400" cy="914400"/>
+          </a:xfrm>
+          <a:prstGeom prst="rect">
+            <a:avLst/>
+          </a:prstGeom>
+          <a:noFill/>
+        </p:spPr>
+        <p:txBody>
+          <a:bodyPr wrap="square">
+            <a:spAutoFit/>
+          </a:bodyPr>
+          <a:lstStyle/>
+          <a:p>
+            <a:pPr algn="l">
+              <a:defRPr sz="3200" b="1">
+                <a:solidFill>
+                  <a:srgbClr val="FFE135"/>
+                </a:solidFill>
+              </a:defRPr>
+            </a:pPr>
+            <a:r>
+              <a:t>Secret を追加</a:t>
             </a:r>
           </a:p>
         </p:txBody>
@@ -10813,6 +12378,190 @@
             </a:pPr>
             <a:r>
               <a:t>• フロントエンドの70%のところにもう立ってるんだよ</a:t>
+            </a:r>
+          </a:p>
+        </p:txBody>
+      </p:sp>
+    </p:spTree>
+  </p:cSld>
+  <p:clrMapOvr>
+    <a:masterClrMapping/>
+  </p:clrMapOvr>
+</p:sld>
+</file>
+
+<file path=ppt/slides/slide50.xml><?xml version="1.0" encoding="utf-8"?>
+<p:sld xmlns:a="http://schemas.openxmlformats.org/drawingml/2006/main" xmlns:p="http://schemas.openxmlformats.org/presentationml/2006/main" xmlns:r="http://schemas.openxmlformats.org/officeDocument/2006/relationships">
+  <p:cSld>
+    <p:bg>
+      <p:bgPr>
+        <a:solidFill>
+          <a:srgbClr val="1A1A2E"/>
+        </a:solidFill>
+        <a:effectLst/>
+      </p:bgPr>
+    </p:bg>
+    <p:spTree>
+      <p:nvGrpSpPr>
+        <p:cNvPr id="1" name=""/>
+        <p:cNvGrpSpPr/>
+        <p:nvPr/>
+      </p:nvGrpSpPr>
+      <p:grpSpPr/>
+      <p:sp>
+        <p:nvSpPr>
+          <p:cNvPr id="2" name="TextBox 1"/>
+          <p:cNvSpPr txBox="1"/>
+          <p:nvPr/>
+        </p:nvSpPr>
+        <p:spPr>
+          <a:xfrm>
+            <a:off x="731520" y="365760"/>
+            <a:ext cx="10058400" cy="914400"/>
+          </a:xfrm>
+          <a:prstGeom prst="rect">
+            <a:avLst/>
+          </a:prstGeom>
+          <a:noFill/>
+        </p:spPr>
+        <p:txBody>
+          <a:bodyPr wrap="square">
+            <a:spAutoFit/>
+          </a:bodyPr>
+          <a:lstStyle/>
+          <a:p>
+            <a:pPr algn="l">
+              <a:defRPr sz="3200" b="1">
+                <a:solidFill>
+                  <a:srgbClr val="FFE135"/>
+                </a:solidFill>
+              </a:defRPr>
+            </a:pPr>
+            <a:r>
+              <a:t>テスト成功！🎉</a:t>
+            </a:r>
+          </a:p>
+        </p:txBody>
+      </p:sp>
+      <p:sp>
+        <p:nvSpPr>
+          <p:cNvPr id="3" name="TextBox 2"/>
+          <p:cNvSpPr txBox="1"/>
+          <p:nvPr/>
+        </p:nvSpPr>
+        <p:spPr>
+          <a:xfrm>
+            <a:off x="731520" y="1828800"/>
+            <a:ext cx="10058400" cy="3657600"/>
+          </a:xfrm>
+          <a:prstGeom prst="rect">
+            <a:avLst/>
+          </a:prstGeom>
+          <a:solidFill>
+            <a:srgbClr val="0D0D0D"/>
+          </a:solidFill>
+        </p:spPr>
+        <p:txBody>
+          <a:bodyPr wrap="square">
+            <a:spAutoFit/>
+          </a:bodyPr>
+          <a:lstStyle/>
+          <a:p>
+            <a:pPr>
+              <a:defRPr sz="1400">
+                <a:solidFill>
+                  <a:srgbClr val="00FF88"/>
+                </a:solidFill>
+                <a:latin typeface="Menlo"/>
+              </a:defRPr>
+            </a:pPr>
+            <a:r>
+              <a:t>curl -X POST "https://あなたのworker.workers.dev" \</a:t>
+            </a:r>
+            <a:br/>
+            <a:r>
+              <a:t>  -H "Content-Type: application/json" \</a:t>
+            </a:r>
+            <a:br/>
+            <a:r>
+              <a:t>  -d '{"prompt":"こんにちは、自己紹介してください"}'</a:t>
+            </a:r>
+            <a:br/>
+            <a:r>
+              <a:t>{</a:t>
+            </a:r>
+            <a:br/>
+            <a:r>
+              <a:t>  "ok": true,</a:t>
+            </a:r>
+            <a:br/>
+            <a:r>
+              <a:t>  "text": "こんにちは！私は Gemini..."</a:t>
+            </a:r>
+            <a:br/>
+            <a:r>
+              <a:t>}</a:t>
+            </a:r>
+          </a:p>
+        </p:txBody>
+      </p:sp>
+    </p:spTree>
+  </p:cSld>
+  <p:clrMapOvr>
+    <a:masterClrMapping/>
+  </p:clrMapOvr>
+</p:sld>
+</file>
+
+<file path=ppt/slides/slide51.xml><?xml version="1.0" encoding="utf-8"?>
+<p:sld xmlns:a="http://schemas.openxmlformats.org/drawingml/2006/main" xmlns:p="http://schemas.openxmlformats.org/presentationml/2006/main" xmlns:r="http://schemas.openxmlformats.org/officeDocument/2006/relationships">
+  <p:cSld>
+    <p:bg>
+      <p:bgPr>
+        <a:solidFill>
+          <a:srgbClr val="441133"/>
+        </a:solidFill>
+        <a:effectLst/>
+      </p:bgPr>
+    </p:bg>
+    <p:spTree>
+      <p:nvGrpSpPr>
+        <p:cNvPr id="1" name=""/>
+        <p:cNvGrpSpPr/>
+        <p:nvPr/>
+      </p:nvGrpSpPr>
+      <p:grpSpPr/>
+      <p:sp>
+        <p:nvSpPr>
+          <p:cNvPr id="2" name="TextBox 1"/>
+          <p:cNvSpPr txBox="1"/>
+          <p:nvPr/>
+        </p:nvSpPr>
+        <p:spPr>
+          <a:xfrm>
+            <a:off x="914400" y="1828800"/>
+            <a:ext cx="10058400" cy="1828800"/>
+          </a:xfrm>
+          <a:prstGeom prst="rect">
+            <a:avLst/>
+          </a:prstGeom>
+          <a:noFill/>
+        </p:spPr>
+        <p:txBody>
+          <a:bodyPr wrap="square">
+            <a:spAutoFit/>
+          </a:bodyPr>
+          <a:lstStyle/>
+          <a:p>
+            <a:pPr algn="ctr">
+              <a:defRPr sz="4000" b="1">
+                <a:solidFill>
+                  <a:srgbClr val="FFE135"/>
+                </a:solidFill>
+              </a:defRPr>
+            </a:pPr>
+            <a:r>
+              <a:t>📝 付録：Jones の教え方メモ</a:t>
             </a:r>
           </a:p>
         </p:txBody>
